--- a/chapter8/parts/part-03-codebooks-provenance-notes/clip.pptx
+++ b/chapter8/parts/part-03-codebooks-provenance-notes/clip.pptx
@@ -4327,10 +4327,12 @@
           </a:bodyPr>
           <a:lstStyle/>
           <a:p>
-            <a:pPr>
+            <a:pPr lvl="0" marL="457200" indent="-228600">
+              <a:buFont typeface="Calibri"/>
               <a:spcAft>
                 <a:spcPts val="1000"/>
               </a:spcAft>
+              <a:buSzPct val="100000"/>
               <a:buChar char="•"/>
               <a:lnSpc>
                 <a:spcPts val="2200"/>
@@ -4347,10 +4349,12 @@
             </a:r>
           </a:p>
           <a:p>
-            <a:pPr>
+            <a:pPr lvl="0" marL="457200" indent="-228600">
+              <a:buFont typeface="Calibri"/>
               <a:spcAft>
                 <a:spcPts val="1000"/>
               </a:spcAft>
+              <a:buSzPct val="100000"/>
               <a:buChar char="•"/>
               <a:lnSpc>
                 <a:spcPts val="2200"/>
@@ -4367,10 +4371,12 @@
             </a:r>
           </a:p>
           <a:p>
-            <a:pPr>
+            <a:pPr lvl="0" marL="457200" indent="-228600">
+              <a:buFont typeface="Calibri"/>
               <a:spcAft>
                 <a:spcPts val="1000"/>
               </a:spcAft>
+              <a:buSzPct val="100000"/>
               <a:buChar char="•"/>
               <a:lnSpc>
                 <a:spcPts val="2200"/>
@@ -4506,10 +4512,12 @@
           </a:bodyPr>
           <a:lstStyle/>
           <a:p>
-            <a:pPr>
+            <a:pPr lvl="0" marL="457200" indent="-228600">
+              <a:buFont typeface="Calibri"/>
               <a:spcAft>
                 <a:spcPts val="1000"/>
               </a:spcAft>
+              <a:buSzPct val="100000"/>
               <a:buChar char="•"/>
               <a:lnSpc>
                 <a:spcPts val="2200"/>
@@ -4526,10 +4534,12 @@
             </a:r>
           </a:p>
           <a:p>
-            <a:pPr>
+            <a:pPr lvl="0" marL="457200" indent="-228600">
+              <a:buFont typeface="Calibri"/>
               <a:spcAft>
                 <a:spcPts val="1000"/>
               </a:spcAft>
+              <a:buSzPct val="100000"/>
               <a:buChar char="•"/>
               <a:lnSpc>
                 <a:spcPts val="2200"/>
@@ -4665,10 +4675,12 @@
           </a:bodyPr>
           <a:lstStyle/>
           <a:p>
-            <a:pPr>
+            <a:pPr lvl="0" marL="457200" indent="-228600">
+              <a:buFont typeface="Calibri"/>
               <a:spcAft>
                 <a:spcPts val="1000"/>
               </a:spcAft>
+              <a:buSzPct val="100000"/>
               <a:buChar char="•"/>
               <a:lnSpc>
                 <a:spcPts val="2200"/>
@@ -4804,10 +4816,12 @@
           </a:bodyPr>
           <a:lstStyle/>
           <a:p>
-            <a:pPr>
+            <a:pPr lvl="0" marL="457200" indent="-228600">
+              <a:buFont typeface="Calibri"/>
               <a:spcAft>
                 <a:spcPts val="1000"/>
               </a:spcAft>
+              <a:buSzPct val="100000"/>
               <a:buChar char="•"/>
               <a:lnSpc>
                 <a:spcPts val="2200"/>
@@ -4824,10 +4838,12 @@
             </a:r>
           </a:p>
           <a:p>
-            <a:pPr>
+            <a:pPr lvl="0" marL="457200" indent="-228600">
+              <a:buFont typeface="Calibri"/>
               <a:spcAft>
                 <a:spcPts val="1000"/>
               </a:spcAft>
+              <a:buSzPct val="100000"/>
               <a:buChar char="•"/>
               <a:lnSpc>
                 <a:spcPts val="2200"/>
@@ -4844,10 +4860,12 @@
             </a:r>
           </a:p>
           <a:p>
-            <a:pPr>
+            <a:pPr lvl="0" marL="457200" indent="-228600">
+              <a:buFont typeface="Calibri"/>
               <a:spcAft>
                 <a:spcPts val="1000"/>
               </a:spcAft>
+              <a:buSzPct val="100000"/>
               <a:buChar char="•"/>
               <a:lnSpc>
                 <a:spcPts val="2200"/>
@@ -4983,10 +5001,12 @@
           </a:bodyPr>
           <a:lstStyle/>
           <a:p>
-            <a:pPr>
+            <a:pPr lvl="0" marL="457200" indent="-228600">
+              <a:buFont typeface="Calibri"/>
               <a:spcAft>
                 <a:spcPts val="1000"/>
               </a:spcAft>
+              <a:buSzPct val="100000"/>
               <a:buChar char="•"/>
               <a:lnSpc>
                 <a:spcPts val="2200"/>
@@ -5003,10 +5023,12 @@
             </a:r>
           </a:p>
           <a:p>
-            <a:pPr>
+            <a:pPr lvl="0" marL="457200" indent="-228600">
+              <a:buFont typeface="Calibri"/>
               <a:spcAft>
                 <a:spcPts val="1000"/>
               </a:spcAft>
+              <a:buSzPct val="100000"/>
               <a:buChar char="•"/>
               <a:lnSpc>
                 <a:spcPts val="2200"/>
@@ -5023,10 +5045,12 @@
             </a:r>
           </a:p>
           <a:p>
-            <a:pPr>
+            <a:pPr lvl="0" marL="457200" indent="-228600">
+              <a:buFont typeface="Calibri"/>
               <a:spcAft>
                 <a:spcPts val="1000"/>
               </a:spcAft>
+              <a:buSzPct val="100000"/>
               <a:buChar char="•"/>
               <a:lnSpc>
                 <a:spcPts val="2200"/>
@@ -5043,10 +5067,12 @@
             </a:r>
           </a:p>
           <a:p>
-            <a:pPr>
+            <a:pPr lvl="0" marL="457200" indent="-228600">
+              <a:buFont typeface="Calibri"/>
               <a:spcAft>
                 <a:spcPts val="1000"/>
               </a:spcAft>
+              <a:buSzPct val="100000"/>
               <a:buChar char="•"/>
               <a:lnSpc>
                 <a:spcPts val="2200"/>
@@ -5398,10 +5424,12 @@
           </a:bodyPr>
           <a:lstStyle/>
           <a:p>
-            <a:pPr>
+            <a:pPr lvl="0" marL="457200" indent="-228600">
+              <a:buFont typeface="Calibri"/>
               <a:spcAft>
                 <a:spcPts val="1000"/>
               </a:spcAft>
+              <a:buSzPct val="100000"/>
               <a:buChar char="•"/>
               <a:lnSpc>
                 <a:spcPts val="2200"/>
@@ -5418,10 +5446,12 @@
             </a:r>
           </a:p>
           <a:p>
-            <a:pPr>
+            <a:pPr lvl="0" marL="457200" indent="-228600">
+              <a:buFont typeface="Calibri"/>
               <a:spcAft>
                 <a:spcPts val="1000"/>
               </a:spcAft>
+              <a:buSzPct val="100000"/>
               <a:buChar char="•"/>
               <a:lnSpc>
                 <a:spcPts val="2200"/>
@@ -5438,10 +5468,12 @@
             </a:r>
           </a:p>
           <a:p>
-            <a:pPr>
+            <a:pPr lvl="0" marL="457200" indent="-228600">
+              <a:buFont typeface="Calibri"/>
               <a:spcAft>
                 <a:spcPts val="1000"/>
               </a:spcAft>
+              <a:buSzPct val="100000"/>
               <a:buChar char="•"/>
               <a:lnSpc>
                 <a:spcPts val="2200"/>
@@ -5577,10 +5609,12 @@
           </a:bodyPr>
           <a:lstStyle/>
           <a:p>
-            <a:pPr>
+            <a:pPr lvl="0" marL="457200" indent="-228600">
+              <a:buFont typeface="Calibri"/>
               <a:spcAft>
                 <a:spcPts val="1000"/>
               </a:spcAft>
+              <a:buSzPct val="100000"/>
               <a:buChar char="•"/>
               <a:lnSpc>
                 <a:spcPts val="2200"/>
@@ -5597,10 +5631,12 @@
             </a:r>
           </a:p>
           <a:p>
-            <a:pPr>
+            <a:pPr lvl="0" marL="457200" indent="-228600">
+              <a:buFont typeface="Calibri"/>
               <a:spcAft>
                 <a:spcPts val="1000"/>
               </a:spcAft>
+              <a:buSzPct val="100000"/>
               <a:buChar char="•"/>
               <a:lnSpc>
                 <a:spcPts val="2200"/>
@@ -5617,10 +5653,12 @@
             </a:r>
           </a:p>
           <a:p>
-            <a:pPr>
+            <a:pPr lvl="0" marL="457200" indent="-228600">
+              <a:buFont typeface="Calibri"/>
               <a:spcAft>
                 <a:spcPts val="1000"/>
               </a:spcAft>
+              <a:buSzPct val="100000"/>
               <a:buChar char="•"/>
               <a:lnSpc>
                 <a:spcPts val="2200"/>
@@ -5637,10 +5675,12 @@
             </a:r>
           </a:p>
           <a:p>
-            <a:pPr>
+            <a:pPr lvl="0" marL="457200" indent="-228600">
+              <a:buFont typeface="Calibri"/>
               <a:spcAft>
                 <a:spcPts val="1000"/>
               </a:spcAft>
+              <a:buSzPct val="100000"/>
               <a:buChar char="•"/>
               <a:lnSpc>
                 <a:spcPts val="2200"/>
@@ -5657,10 +5697,12 @@
             </a:r>
           </a:p>
           <a:p>
-            <a:pPr>
+            <a:pPr lvl="0" marL="457200" indent="-228600">
+              <a:buFont typeface="Calibri"/>
               <a:spcAft>
                 <a:spcPts val="1000"/>
               </a:spcAft>
+              <a:buSzPct val="100000"/>
               <a:buChar char="•"/>
               <a:lnSpc>
                 <a:spcPts val="2200"/>
@@ -5796,10 +5838,12 @@
           </a:bodyPr>
           <a:lstStyle/>
           <a:p>
-            <a:pPr>
+            <a:pPr lvl="0" marL="457200" indent="-228600">
+              <a:buFont typeface="Calibri"/>
               <a:spcAft>
                 <a:spcPts val="1000"/>
               </a:spcAft>
+              <a:buSzPct val="100000"/>
               <a:buChar char="•"/>
               <a:lnSpc>
                 <a:spcPts val="2200"/>
@@ -5816,10 +5860,12 @@
             </a:r>
           </a:p>
           <a:p>
-            <a:pPr>
+            <a:pPr lvl="0" marL="457200" indent="-228600">
+              <a:buFont typeface="Calibri"/>
               <a:spcAft>
                 <a:spcPts val="1000"/>
               </a:spcAft>
+              <a:buSzPct val="100000"/>
               <a:buChar char="•"/>
               <a:lnSpc>
                 <a:spcPts val="2200"/>
@@ -5955,10 +6001,12 @@
           </a:bodyPr>
           <a:lstStyle/>
           <a:p>
-            <a:pPr>
+            <a:pPr lvl="0" marL="457200" indent="-228600">
+              <a:buFont typeface="Calibri"/>
               <a:spcAft>
                 <a:spcPts val="1000"/>
               </a:spcAft>
+              <a:buSzPct val="100000"/>
               <a:buChar char="•"/>
               <a:lnSpc>
                 <a:spcPts val="2200"/>
@@ -5975,10 +6023,12 @@
             </a:r>
           </a:p>
           <a:p>
-            <a:pPr>
+            <a:pPr lvl="0" marL="457200" indent="-228600">
+              <a:buFont typeface="Calibri"/>
               <a:spcAft>
                 <a:spcPts val="1000"/>
               </a:spcAft>
+              <a:buSzPct val="100000"/>
               <a:buChar char="•"/>
               <a:lnSpc>
                 <a:spcPts val="2200"/>
@@ -5995,10 +6045,12 @@
             </a:r>
           </a:p>
           <a:p>
-            <a:pPr>
+            <a:pPr lvl="0" marL="457200" indent="-228600">
+              <a:buFont typeface="Calibri"/>
               <a:spcAft>
                 <a:spcPts val="1000"/>
               </a:spcAft>
+              <a:buSzPct val="100000"/>
               <a:buChar char="•"/>
               <a:lnSpc>
                 <a:spcPts val="2200"/>
@@ -6015,10 +6067,12 @@
             </a:r>
           </a:p>
           <a:p>
-            <a:pPr>
+            <a:pPr lvl="0" marL="457200" indent="-228600">
+              <a:buFont typeface="Calibri"/>
               <a:spcAft>
                 <a:spcPts val="1000"/>
               </a:spcAft>
+              <a:buSzPct val="100000"/>
               <a:buChar char="•"/>
               <a:lnSpc>
                 <a:spcPts val="2200"/>
@@ -6035,10 +6089,12 @@
             </a:r>
           </a:p>
           <a:p>
-            <a:pPr>
+            <a:pPr lvl="0" marL="457200" indent="-228600">
+              <a:buFont typeface="Calibri"/>
               <a:spcAft>
                 <a:spcPts val="1000"/>
               </a:spcAft>
+              <a:buSzPct val="100000"/>
               <a:buChar char="•"/>
               <a:lnSpc>
                 <a:spcPts val="2200"/>
